--- a/level1/slides/Level1_Lesson1_Slides.pptx
+++ b/level1/slides/Level1_Lesson1_Slides.pptx
@@ -12893,6 +12893,26 @@
                 <a:cs typeface="Lexend Deca" pitchFamily="34" charset="-120"/>
               </a:rPr>
               <a:t>Audio: synthetic voices made with Chatterbox TTS (MIT License); each file carries an inaudible Perth watermark marking it as AI-generated. Font: Lexend Deca (OFL 1.1).</a:t>
+            </a:r>
+            <a:endParaRPr lang="en-US" sz="2200" dirty="0"/>
+          </a:p>
+          <a:p>
+            <a:pPr algn="l" indent="0" marL="0">
+              <a:spcAft>
+                <a:spcPts val="600"/>
+              </a:spcAft>
+              <a:buNone/>
+            </a:pPr>
+            <a:r>
+              <a:rPr lang="en-US" sz="1600" dirty="0" b="0">
+                <a:solidFill>
+                  <a:srgbClr val="1B2236"/>
+                </a:solidFill>
+                <a:latin typeface="Lexend Deca" pitchFamily="34" charset="0"/>
+                <a:ea typeface="Lexend Deca" pitchFamily="34" charset="-122"/>
+                <a:cs typeface="Lexend Deca" pitchFamily="34" charset="-120"/>
+              </a:rPr>
+              <a:t>© 2026 the authors. The authors license this deck under CC BY-NC-SA 4.0.</a:t>
             </a:r>
             <a:endParaRPr lang="en-US" sz="2200" dirty="0"/>
           </a:p>

--- a/level1/slides/Level1_Lesson1_Slides.pptx
+++ b/level1/slides/Level1_Lesson1_Slides.pptx
@@ -1034,7 +1034,7 @@
           <a:p>
             <a:r>
               <a:rPr lang="en-US" dirty="0"/>
-              <a:t>Say: "Listen again. Circle the letters." Point to the ⭕ icon. R (Ana) and A (Carlos) are already there.</a:t>
+              <a:t>Say: "Listen again. Circle the letters." R (Ana) and A (Carlos) are already there.</a:t>
             </a:r>
           </a:p>
           <a:p>
@@ -1310,7 +1310,7 @@
           <a:p>
             <a:r>
               <a:rPr lang="en-US" dirty="0"/>
-              <a:t>Homework (10 minutes): open the Homework page. Do item 1 together. Point to each icon so learners know what to do at home.</a:t>
+              <a:t>Homework (10 minutes): open the Homework page. Do item 1 together. Point to each instruction so learners know what to do at home.</a:t>
             </a:r>
           </a:p>
           <a:p>
@@ -1820,7 +1820,7 @@
           <a:p>
             <a:r>
               <a:rPr lang="en-US" dirty="0"/>
-              <a:t>Show the icons: 👥 partner, ☝️ point, 🗣️ say.</a:t>
+              <a:t>Show it: point to two people ("Partner"), point to a picture ("Point"), and say the word ("Say").</a:t>
             </a:r>
           </a:p>
           <a:p>
@@ -2171,13 +2171,13 @@
           <a:p>
             <a:r>
               <a:rPr lang="en-US" dirty="0"/>
-              <a:t>Click once for each row. Point to the icon and do the action. Learners copy your gesture.</a:t>
+              <a:t>Click once for each row. Say each word and do the action. Learners copy your gesture.</a:t>
             </a:r>
           </a:p>
           <a:p>
             <a:r>
               <a:rPr lang="en-US" dirty="0"/>
-              <a:t>👂 Hand to your ear: "Listen."  🗣️ "Say."  ✏️ Mime writing: "Write."  👥 Point to two people: "Partner."  🚶 Walk a few steps: "Walk and talk."</a:t>
+              <a:t>Hand to your ear: "Listen."  "Say."  Mime writing: "Write."  Point to two people: "Partner."  Walk a few steps: "Walk and talk."</a:t>
             </a:r>
           </a:p>
           <a:p>
@@ -2201,13 +2201,13 @@
           <a:p>
             <a:r>
               <a:rPr lang="en-US" dirty="0"/>
-              <a:t>If you are behind: show the icons and say the 3 rules only.</a:t>
+              <a:t>If you are behind: say the 3 rules only.</a:t>
             </a:r>
           </a:p>
           <a:p>
             <a:r>
               <a:rPr lang="en-US" dirty="0"/>
-              <a:t>Source: Level1_Lesson1.md, Lesson 1 (Step 2: Orientation; Student Pages: The Icons, How Our Class Works).</a:t>
+              <a:t>Source: Level1_Lesson1.md, Lesson 1 (Step 2: Orientation; Student Pages: How Our Class Works).</a:t>
             </a:r>
           </a:p>
         </p:txBody>
@@ -2300,7 +2300,7 @@
           <a:p>
             <a:r>
               <a:rPr lang="en-US" dirty="0"/>
-              <a:t>Say: "Write one word." Point to the ✏️ icon. Do number 1 together.</a:t>
+              <a:t>Say: "Write one word." Do number 1 together.</a:t>
             </a:r>
           </a:p>
           <a:p>
@@ -3296,7 +3296,7 @@
           <a:p>
             <a:r>
               <a:rPr lang="en-US" dirty="0"/>
-              <a:t>👂 Hand to your ear: "Listen."  🗣️ Point to your mouth: "Repeat."  ✏️ Mime writing: "Write."</a:t>
+              <a:t>Hand to your ear: "Listen."  Point to your mouth: "Repeat."  Mime writing: "Write."</a:t>
             </a:r>
           </a:p>
           <a:p>
@@ -5188,7 +5188,7 @@
                 <a:ea typeface="Lexend Deca" pitchFamily="34" charset="-122"/>
                 <a:cs typeface="Lexend Deca" pitchFamily="34" charset="-120"/>
               </a:rPr>
-              <a:t>👂 ⭕  Listen. Circle the letters.</a:t>
+              <a:t>Listen. Circle the letters.</a:t>
             </a:r>
             <a:endParaRPr lang="en-US" sz="2000" dirty="0"/>
           </a:p>
@@ -5956,8 +5956,8 @@
         </p:nvSpPr>
         <p:spPr>
           <a:xfrm>
-            <a:off x="1583741" y="4550054"/>
-            <a:ext cx="5130698" cy="602590"/>
+            <a:off x="548640" y="4550054"/>
+            <a:ext cx="6163056" cy="602590"/>
           </a:xfrm>
           <a:prstGeom prst="round1Rect">
             <a:avLst>
@@ -5982,8 +5982,8 @@
         </p:nvSpPr>
         <p:spPr>
           <a:xfrm>
-            <a:off x="1583741" y="5261458"/>
-            <a:ext cx="5130698" cy="602590"/>
+            <a:off x="548640" y="5261458"/>
+            <a:ext cx="6163056" cy="602590"/>
           </a:xfrm>
           <a:prstGeom prst="round1Rect">
             <a:avLst>
@@ -6033,7 +6033,7 @@
                 <a:ea typeface="Lexend Deca" pitchFamily="34" charset="-122"/>
                 <a:cs typeface="Lexend Deca" pitchFamily="34" charset="-120"/>
               </a:rPr>
-              <a:t>👂 ✏️  Listen again.</a:t>
+              <a:t>Listen again.</a:t>
             </a:r>
             <a:endParaRPr lang="en-US" sz="2000" dirty="0"/>
           </a:p>
@@ -6164,8 +6164,8 @@
         </p:nvSpPr>
         <p:spPr>
           <a:xfrm>
-            <a:off x="1810512" y="4550054"/>
-            <a:ext cx="4754880" cy="602590"/>
+            <a:off x="777240" y="4550054"/>
+            <a:ext cx="5760720" cy="602590"/>
           </a:xfrm>
           <a:prstGeom prst="rect">
             <a:avLst/>
@@ -6214,8 +6214,8 @@
         </p:nvSpPr>
         <p:spPr>
           <a:xfrm>
-            <a:off x="1810512" y="5261458"/>
-            <a:ext cx="4754880" cy="602590"/>
+            <a:off x="777240" y="5261458"/>
+            <a:ext cx="5760720" cy="602590"/>
           </a:xfrm>
           <a:prstGeom prst="rect">
             <a:avLst/>
@@ -6440,132 +6440,6 @@
                 <a:cs typeface="Lexend Deca" pitchFamily="34" charset="-120"/>
               </a:rPr>
               <a:t>2</a:t>
-            </a:r>
-            <a:endParaRPr lang="en-US" sz="3200" dirty="0"/>
-          </a:p>
-        </p:txBody>
-      </p:sp>
-      <p:sp>
-        <p:nvSpPr>
-          <p:cNvPr id="25" name="Shape 23"/>
-          <p:cNvSpPr/>
-          <p:nvPr/>
-        </p:nvSpPr>
-        <p:spPr>
-          <a:xfrm>
-            <a:off x="544982" y="4550054"/>
-            <a:ext cx="1039673" cy="602590"/>
-          </a:xfrm>
-          <a:prstGeom prst="rect">
-            <a:avLst/>
-          </a:prstGeom>
-          <a:solidFill>
-            <a:srgbClr val="B9D2F7"/>
-          </a:solidFill>
-          <a:ln/>
-        </p:spPr>
-        <p:txBody>
-          <a:bodyPr/>
-          <a:p/>
-        </p:txBody>
-      </p:sp>
-      <p:sp>
-        <p:nvSpPr>
-          <p:cNvPr id="26" name="Text 24"/>
-          <p:cNvSpPr/>
-          <p:nvPr/>
-        </p:nvSpPr>
-        <p:spPr>
-          <a:xfrm>
-            <a:off x="686714" y="4543654"/>
-            <a:ext cx="1109167" cy="585216"/>
-          </a:xfrm>
-          <a:prstGeom prst="rect">
-            <a:avLst/>
-          </a:prstGeom>
-          <a:noFill/>
-          <a:ln/>
-        </p:spPr>
-        <p:txBody>
-          <a:bodyPr wrap="square" rtlCol="0" anchor="ctr"/>
-          <a:lstStyle/>
-          <a:p>
-            <a:pPr algn="ctr" indent="0" marL="0">
-              <a:buNone/>
-            </a:pPr>
-            <a:r>
-              <a:rPr lang="en-US" sz="3200" dirty="0" b="1">
-                <a:solidFill>
-                  <a:srgbClr val="1B2236"/>
-                </a:solidFill>
-                <a:latin typeface="Lexend Deca" pitchFamily="34" charset="0"/>
-                <a:ea typeface="Lexend Deca" pitchFamily="34" charset="-122"/>
-                <a:cs typeface="Lexend Deca" pitchFamily="34" charset="-120"/>
-              </a:rPr>
-              <a:t>🗣️</a:t>
-            </a:r>
-            <a:endParaRPr lang="en-US" sz="3200" dirty="0"/>
-          </a:p>
-        </p:txBody>
-      </p:sp>
-      <p:sp>
-        <p:nvSpPr>
-          <p:cNvPr id="27" name="Shape 25"/>
-          <p:cNvSpPr/>
-          <p:nvPr/>
-        </p:nvSpPr>
-        <p:spPr>
-          <a:xfrm>
-            <a:off x="544982" y="5279746"/>
-            <a:ext cx="1039673" cy="602590"/>
-          </a:xfrm>
-          <a:prstGeom prst="rect">
-            <a:avLst/>
-          </a:prstGeom>
-          <a:solidFill>
-            <a:srgbClr val="B9D2F7"/>
-          </a:solidFill>
-          <a:ln/>
-        </p:spPr>
-        <p:txBody>
-          <a:bodyPr/>
-          <a:p/>
-        </p:txBody>
-      </p:sp>
-      <p:sp>
-        <p:nvSpPr>
-          <p:cNvPr id="28" name="Text 26"/>
-          <p:cNvSpPr/>
-          <p:nvPr/>
-        </p:nvSpPr>
-        <p:spPr>
-          <a:xfrm>
-            <a:off x="686714" y="5269687"/>
-            <a:ext cx="1109167" cy="585216"/>
-          </a:xfrm>
-          <a:prstGeom prst="rect">
-            <a:avLst/>
-          </a:prstGeom>
-          <a:noFill/>
-          <a:ln/>
-        </p:spPr>
-        <p:txBody>
-          <a:bodyPr wrap="square" rtlCol="0" anchor="ctr"/>
-          <a:lstStyle/>
-          <a:p>
-            <a:pPr algn="ctr" indent="0" marL="0">
-              <a:buNone/>
-            </a:pPr>
-            <a:r>
-              <a:rPr lang="en-US" sz="3200" dirty="0" b="1">
-                <a:solidFill>
-                  <a:srgbClr val="1B2236"/>
-                </a:solidFill>
-                <a:latin typeface="Lexend Deca" pitchFamily="34" charset="0"/>
-                <a:ea typeface="Lexend Deca" pitchFamily="34" charset="-122"/>
-                <a:cs typeface="Lexend Deca" pitchFamily="34" charset="-120"/>
-              </a:rPr>
-              <a:t>🗣️</a:t>
             </a:r>
             <a:endParaRPr lang="en-US" sz="3200" dirty="0"/>
           </a:p>
@@ -10213,8 +10087,8 @@
         </p:nvSpPr>
         <p:spPr>
           <a:xfrm>
-            <a:off x="1583741" y="1349654"/>
-            <a:ext cx="5130698" cy="983894"/>
+            <a:off x="548640" y="1349654"/>
+            <a:ext cx="6163056" cy="983894"/>
           </a:xfrm>
           <a:prstGeom prst="round1Rect">
             <a:avLst>
@@ -10369,8 +10243,8 @@
         </p:nvSpPr>
         <p:spPr>
           <a:xfrm>
-            <a:off x="1810512" y="1417320"/>
-            <a:ext cx="4434840" cy="384048"/>
+            <a:off x="777240" y="1417320"/>
+            <a:ext cx="5440680" cy="384048"/>
           </a:xfrm>
           <a:prstGeom prst="rect">
             <a:avLst/>
@@ -10408,8 +10282,8 @@
         </p:nvSpPr>
         <p:spPr>
           <a:xfrm>
-            <a:off x="1901952" y="1819656"/>
-            <a:ext cx="4343400" cy="411480"/>
+            <a:off x="868680" y="1819656"/>
+            <a:ext cx="5349240" cy="411480"/>
           </a:xfrm>
           <a:prstGeom prst="rect">
             <a:avLst/>
@@ -10716,69 +10590,6 @@
               <a:t>Yes, I ____.</a:t>
             </a:r>
             <a:endParaRPr lang="en-US" sz="2000" dirty="0"/>
-          </a:p>
-        </p:txBody>
-      </p:sp>
-      <p:sp>
-        <p:nvSpPr>
-          <p:cNvPr id="19" name="Shape 17"/>
-          <p:cNvSpPr/>
-          <p:nvPr/>
-        </p:nvSpPr>
-        <p:spPr>
-          <a:xfrm>
-            <a:off x="544982" y="1349654"/>
-            <a:ext cx="1039673" cy="983894"/>
-          </a:xfrm>
-          <a:prstGeom prst="rect">
-            <a:avLst/>
-          </a:prstGeom>
-          <a:solidFill>
-            <a:srgbClr val="B9D2F7"/>
-          </a:solidFill>
-          <a:ln/>
-        </p:spPr>
-        <p:txBody>
-          <a:bodyPr/>
-          <a:p/>
-        </p:txBody>
-      </p:sp>
-      <p:sp>
-        <p:nvSpPr>
-          <p:cNvPr id="20" name="Text 18"/>
-          <p:cNvSpPr/>
-          <p:nvPr/>
-        </p:nvSpPr>
-        <p:spPr>
-          <a:xfrm>
-            <a:off x="686714" y="1480414"/>
-            <a:ext cx="1109167" cy="646481"/>
-          </a:xfrm>
-          <a:prstGeom prst="rect">
-            <a:avLst/>
-          </a:prstGeom>
-          <a:noFill/>
-          <a:ln/>
-        </p:spPr>
-        <p:txBody>
-          <a:bodyPr wrap="square" rtlCol="0" anchor="ctr"/>
-          <a:lstStyle/>
-          <a:p>
-            <a:pPr algn="ctr" indent="0" marL="0">
-              <a:buNone/>
-            </a:pPr>
-            <a:r>
-              <a:rPr lang="en-US" sz="3600" dirty="0" b="1">
-                <a:solidFill>
-                  <a:srgbClr val="1B2236"/>
-                </a:solidFill>
-                <a:latin typeface="Lexend Deca" pitchFamily="34" charset="0"/>
-                <a:ea typeface="Lexend Deca" pitchFamily="34" charset="-122"/>
-                <a:cs typeface="Lexend Deca" pitchFamily="34" charset="-120"/>
-              </a:rPr>
-              <a:t>✏️</a:t>
-            </a:r>
-            <a:endParaRPr lang="en-US" sz="3600" dirty="0"/>
           </a:p>
         </p:txBody>
       </p:sp>
@@ -13195,7 +13006,7 @@
                 <a:ea typeface="Lexend Deca" pitchFamily="34" charset="-122"/>
                 <a:cs typeface="Lexend Deca" pitchFamily="34" charset="-120"/>
               </a:rPr>
-              <a:t>🚶 🗣️ ✏️</a:t>
+              <a:t>Walk and talk.</a:t>
             </a:r>
             <a:endParaRPr lang="en-US" sz="2000" dirty="0"/>
           </a:p>
@@ -13622,7 +13433,7 @@
                 <a:ea typeface="Lexend Deca" pitchFamily="34" charset="-122"/>
                 <a:cs typeface="Lexend Deca" pitchFamily="34" charset="-120"/>
               </a:rPr>
-              <a:t>✏️ Write the name.</a:t>
+              <a:t>Write the name.</a:t>
             </a:r>
             <a:endParaRPr lang="en-US" sz="2200" dirty="0"/>
           </a:p>
@@ -13727,7 +13538,7 @@
                 <a:ea typeface="Lexend Deca" pitchFamily="34" charset="-122"/>
                 <a:cs typeface="Lexend Deca" pitchFamily="34" charset="-120"/>
               </a:rPr>
-              <a:t>✅ Your partner checks.</a:t>
+              <a:t>Your partner checks.</a:t>
             </a:r>
             <a:endParaRPr lang="en-US" sz="2200" dirty="0"/>
           </a:p>
@@ -14550,7 +14361,7 @@
                 <a:ea typeface="Lexend Deca" pitchFamily="34" charset="-122"/>
                 <a:cs typeface="Lexend Deca" pitchFamily="34" charset="-120"/>
               </a:rPr>
-              <a:t>🏠 Homework</a:t>
+              <a:t>Homework</a:t>
             </a:r>
             <a:endParaRPr lang="en-US" sz="2200" dirty="0"/>
           </a:p>
@@ -14596,7 +14407,7 @@
                 <a:ea typeface="Lexend Deca" pitchFamily="34" charset="-122"/>
                 <a:cs typeface="Lexend Deca" pitchFamily="34" charset="-120"/>
               </a:rPr>
-              <a:t>1. ✏️ Write your name.</a:t>
+              <a:t>1. Write your name.</a:t>
             </a:r>
             <a:endParaRPr lang="en-US" sz="2000" dirty="0"/>
           </a:p>
@@ -14616,7 +14427,7 @@
                 <a:ea typeface="Lexend Deca" pitchFamily="34" charset="-122"/>
                 <a:cs typeface="Lexend Deca" pitchFamily="34" charset="-120"/>
               </a:rPr>
-              <a:t>2. 🗣️ Ask a friend's name.</a:t>
+              <a:t>2. Ask a friend's name.</a:t>
             </a:r>
             <a:endParaRPr lang="en-US" sz="2000" dirty="0"/>
           </a:p>
@@ -14636,7 +14447,7 @@
                 <a:ea typeface="Lexend Deca" pitchFamily="34" charset="-122"/>
                 <a:cs typeface="Lexend Deca" pitchFamily="34" charset="-120"/>
               </a:rPr>
-              <a:t>3. 📖 Write the words.</a:t>
+              <a:t>3. Write the words.</a:t>
             </a:r>
             <a:endParaRPr lang="en-US" sz="2000" dirty="0"/>
           </a:p>
@@ -14656,7 +14467,7 @@
                 <a:ea typeface="Lexend Deca" pitchFamily="34" charset="-122"/>
                 <a:cs typeface="Lexend Deca" pitchFamily="34" charset="-120"/>
               </a:rPr>
-              <a:t>4. 🗣️ Say A to Z, 2 times.</a:t>
+              <a:t>4. Say A to Z, 2 times.</a:t>
             </a:r>
             <a:endParaRPr lang="en-US" sz="2000" dirty="0"/>
           </a:p>
@@ -19156,7 +18967,7 @@
                 <a:ea typeface="Lexend Deca" pitchFamily="34" charset="-122"/>
                 <a:cs typeface="Lexend Deca" pitchFamily="34" charset="-120"/>
               </a:rPr>
-              <a:t>👂 ⭕  Listen to the teacher.</a:t>
+              <a:t>Listen to the teacher.</a:t>
             </a:r>
             <a:endParaRPr lang="en-US" sz="2200" dirty="0"/>
           </a:p>
@@ -20818,7 +20629,7 @@
                 <a:ea typeface="Lexend Deca" pitchFamily="34" charset="-122"/>
                 <a:cs typeface="Lexend Deca" pitchFamily="34" charset="-120"/>
               </a:rPr>
-              <a:t>D. ✅ I can…</a:t>
+              <a:t>D. I can…</a:t>
             </a:r>
             <a:endParaRPr lang="en-US" sz="2200" dirty="0"/>
           </a:p>
@@ -21173,7 +20984,7 @@
                 <a:ea typeface="Lexend Deca" pitchFamily="34" charset="-122"/>
                 <a:cs typeface="Lexend Deca" pitchFamily="34" charset="-120"/>
               </a:rPr>
-              <a:t>📖 🔗 Question</a:t>
+              <a:t>Match the question</a:t>
             </a:r>
             <a:endParaRPr lang="en-US" sz="2200" dirty="0"/>
           </a:p>
@@ -22589,7 +22400,7 @@
                 <a:ea typeface="Lexend Deca" pitchFamily="34" charset="-122"/>
                 <a:cs typeface="Lexend Deca" pitchFamily="34" charset="-120"/>
               </a:rPr>
-              <a:t>Task icons are standard emoji characters shown with the computer's emoji font.</a:t>
+              <a:t>Other small pictures (for example, the faces on the Progress Check) are standard emoji characters shown with the computer's emoji font.</a:t>
             </a:r>
             <a:endParaRPr lang="en-US" sz="2200" dirty="0"/>
           </a:p>
@@ -23414,8 +23225,8 @@
         </p:nvSpPr>
         <p:spPr>
           <a:xfrm>
-            <a:off x="544982" y="2093062"/>
-            <a:ext cx="6227064" cy="983894"/>
+            <a:off x="548640" y="2414015"/>
+            <a:ext cx="6163056" cy="603504"/>
           </a:xfrm>
           <a:prstGeom prst="round1Rect">
             <a:avLst>
@@ -23440,8 +23251,8 @@
         </p:nvSpPr>
         <p:spPr>
           <a:xfrm>
-            <a:off x="1583741" y="2035454"/>
-            <a:ext cx="5130698" cy="983894"/>
+            <a:off x="1583741" y="2414015"/>
+            <a:ext cx="5130698" cy="603504"/>
           </a:xfrm>
           <a:prstGeom prst="round1Rect">
             <a:avLst>
@@ -23570,8 +23381,8 @@
         </p:nvSpPr>
         <p:spPr>
           <a:xfrm>
-            <a:off x="1810512" y="2103120"/>
-            <a:ext cx="4434840" cy="384048"/>
+            <a:off x="1810512" y="2414015"/>
+            <a:ext cx="4434840" cy="603504"/>
           </a:xfrm>
           <a:prstGeom prst="rect">
             <a:avLst/>
@@ -23580,22 +23391,22 @@
           <a:ln/>
         </p:spPr>
         <p:txBody>
-          <a:bodyPr wrap="square" rtlCol="0" anchor="t"/>
+          <a:bodyPr wrap="square" rtlCol="0" anchor="ctr"/>
           <a:lstStyle/>
           <a:p>
             <a:pPr algn="l" indent="0" marL="0">
               <a:buNone/>
             </a:pPr>
             <a:r>
-              <a:rPr lang="en-US" sz="2000" dirty="0" b="1">
-                <a:solidFill>
-                  <a:srgbClr val="1B2236"/>
-                </a:solidFill>
-                <a:latin typeface="Lexend Deca" pitchFamily="34" charset="0"/>
-                <a:ea typeface="Lexend Deca" pitchFamily="34" charset="-122"/>
-                <a:cs typeface="Lexend Deca" pitchFamily="34" charset="-120"/>
-              </a:rPr>
-              <a:t>👂  Listen.</a:t>
+              <a:rPr lang="en-US" sz="2000" dirty="0" b="0">
+                <a:solidFill>
+                  <a:srgbClr val="1B2236"/>
+                </a:solidFill>
+                <a:latin typeface="Lexend Deca" pitchFamily="34" charset="0"/>
+                <a:ea typeface="Lexend Deca" pitchFamily="34" charset="-122"/>
+                <a:cs typeface="Lexend Deca" pitchFamily="34" charset="-120"/>
+              </a:rPr>
+              <a:t>Listen.</a:t>
             </a:r>
             <a:endParaRPr lang="en-US" sz="2000" dirty="0"/>
           </a:p>
@@ -23603,52 +23414,13 @@
       </p:sp>
       <p:sp>
         <p:nvSpPr>
-          <p:cNvPr id="9" name="Text 7"/>
-          <p:cNvSpPr/>
-          <p:nvPr/>
-        </p:nvSpPr>
-        <p:spPr>
-          <a:xfrm>
-            <a:off x="1901952" y="2505456"/>
-            <a:ext cx="4343400" cy="411480"/>
-          </a:xfrm>
-          <a:prstGeom prst="rect">
-            <a:avLst/>
-          </a:prstGeom>
-          <a:noFill/>
-          <a:ln/>
-        </p:spPr>
-        <p:txBody>
-          <a:bodyPr wrap="square" lIns="0" tIns="0" rIns="0" bIns="0" rtlCol="0" anchor="t"/>
-          <a:lstStyle/>
-          <a:p>
-            <a:pPr algn="l" indent="0" marL="0">
-              <a:buNone/>
-            </a:pPr>
-            <a:r>
-              <a:rPr lang="en-US" sz="2000" dirty="0">
-                <a:solidFill>
-                  <a:srgbClr val="1B2236"/>
-                </a:solidFill>
-                <a:latin typeface="Lexend Deca" pitchFamily="34" charset="0"/>
-                <a:ea typeface="Lexend Deca" pitchFamily="34" charset="-122"/>
-                <a:cs typeface="Lexend Deca" pitchFamily="34" charset="-120"/>
-              </a:rPr>
-              <a:t>Every task has an icon.</a:t>
-            </a:r>
-            <a:endParaRPr lang="en-US" sz="2000" dirty="0"/>
-          </a:p>
-        </p:txBody>
-      </p:sp>
-      <p:sp>
-        <p:nvSpPr>
           <p:cNvPr id="10" name="Shape 8"/>
           <p:cNvSpPr/>
           <p:nvPr/>
         </p:nvSpPr>
         <p:spPr>
           <a:xfrm rot="10800000">
-            <a:off x="6361481" y="2230222"/>
+            <a:off x="6361481" y="2551175"/>
             <a:ext cx="88697" cy="76810"/>
           </a:xfrm>
           <a:prstGeom prst="triangle">
@@ -23697,7 +23469,7 @@
                 <a:ea typeface="Lexend Deca" pitchFamily="34" charset="-122"/>
                 <a:cs typeface="Lexend Deca" pitchFamily="34" charset="-120"/>
               </a:rPr>
-              <a:t>🗣️  Say. Repeat.</a:t>
+              <a:t>Say. Repeat.</a:t>
             </a:r>
             <a:endParaRPr lang="en-US" sz="2000" dirty="0"/>
           </a:p>
@@ -23760,7 +23532,7 @@
                 <a:ea typeface="Lexend Deca" pitchFamily="34" charset="-122"/>
                 <a:cs typeface="Lexend Deca" pitchFamily="34" charset="-120"/>
               </a:rPr>
-              <a:t>✏️  Write.</a:t>
+              <a:t>Write.</a:t>
             </a:r>
             <a:endParaRPr lang="en-US" sz="2000" dirty="0"/>
           </a:p>
@@ -23823,7 +23595,7 @@
                 <a:ea typeface="Lexend Deca" pitchFamily="34" charset="-122"/>
                 <a:cs typeface="Lexend Deca" pitchFamily="34" charset="-120"/>
               </a:rPr>
-              <a:t>👥  Work with a partner.</a:t>
+              <a:t>Work with a partner.</a:t>
             </a:r>
             <a:endParaRPr lang="en-US" sz="2000" dirty="0"/>
           </a:p>
@@ -23886,7 +23658,7 @@
                 <a:ea typeface="Lexend Deca" pitchFamily="34" charset="-122"/>
                 <a:cs typeface="Lexend Deca" pitchFamily="34" charset="-120"/>
               </a:rPr>
-              <a:t>🚶  Walk and talk.</a:t>
+              <a:t>Walk and talk.</a:t>
             </a:r>
             <a:endParaRPr lang="en-US" sz="2000" dirty="0"/>
           </a:p>
@@ -23924,8 +23696,8 @@
         </p:nvSpPr>
         <p:spPr>
           <a:xfrm>
-            <a:off x="544982" y="2035454"/>
-            <a:ext cx="1039673" cy="983894"/>
+            <a:off x="544982" y="2414015"/>
+            <a:ext cx="1039673" cy="603504"/>
           </a:xfrm>
           <a:prstGeom prst="rect">
             <a:avLst/>
@@ -23948,8 +23720,8 @@
         </p:nvSpPr>
         <p:spPr>
           <a:xfrm>
-            <a:off x="686714" y="2166214"/>
-            <a:ext cx="1109167" cy="646481"/>
+            <a:off x="686714" y="2395727"/>
+            <a:ext cx="1109167" cy="585216"/>
           </a:xfrm>
           <a:prstGeom prst="rect">
             <a:avLst/>
@@ -24430,7 +24202,7 @@
         </p:nvSpPr>
         <p:spPr>
           <a:xfrm>
-            <a:off x="6184087" y="1804111"/>
+            <a:off x="6184087" y="2176272"/>
             <a:ext cx="727862" cy="687570"/>
           </a:xfrm>
           <a:prstGeom prst="star10">
@@ -24454,7 +24226,7 @@
         </p:nvSpPr>
         <p:spPr>
           <a:xfrm>
-            <a:off x="6242576" y="1795013"/>
+            <a:off x="6242576" y="2167127"/>
             <a:ext cx="740860" cy="740860"/>
           </a:xfrm>
           <a:prstGeom prst="star10">
@@ -24478,7 +24250,7 @@
         </p:nvSpPr>
         <p:spPr>
           <a:xfrm rot="900000">
-            <a:off x="6444038" y="2007523"/>
+            <a:off x="6444038" y="2386584"/>
             <a:ext cx="316490" cy="316490"/>
           </a:xfrm>
           <a:prstGeom prst="mathPlus">
@@ -24688,41 +24460,6 @@
                                         <p:cTn id="19" dur="400"/>
                                         <p:tgtEl>
                                           <p:spTgt spid="8"/>
-                                        </p:tgtEl>
-                                      </p:cBhvr>
-                                    </p:animEffect>
-                                  </p:childTnLst>
-                                </p:cTn>
-                              </p:par>
-                              <p:par>
-                                <p:cTn id="20" presetID="10" presetClass="entr" presetSubtype="0" fill="hold" nodeType="withEffect">
-                                  <p:stCondLst>
-                                    <p:cond delay="0"/>
-                                  </p:stCondLst>
-                                  <p:childTnLst>
-                                    <p:set>
-                                      <p:cBhvr>
-                                        <p:cTn id="21" dur="1" fill="hold">
-                                          <p:stCondLst>
-                                            <p:cond delay="0"/>
-                                          </p:stCondLst>
-                                        </p:cTn>
-                                        <p:tgtEl>
-                                          <p:spTgt spid="9"/>
-                                        </p:tgtEl>
-                                        <p:attrNameLst>
-                                          <p:attrName>style.visibility</p:attrName>
-                                        </p:attrNameLst>
-                                      </p:cBhvr>
-                                      <p:to>
-                                        <p:strVal val="visible"/>
-                                      </p:to>
-                                    </p:set>
-                                    <p:animEffect transition="in" filter="fade">
-                                      <p:cBhvr>
-                                        <p:cTn id="22" dur="400"/>
-                                        <p:tgtEl>
-                                          <p:spTgt spid="9"/>
                                         </p:tgtEl>
                                       </p:cBhvr>
                                     </p:animEffect>
@@ -27034,7 +26771,7 @@
                 <a:ea typeface="Lexend Deca" pitchFamily="34" charset="-122"/>
                 <a:cs typeface="Lexend Deca" pitchFamily="34" charset="-120"/>
               </a:rPr>
-              <a:t>👥 ☝️ 🗣️</a:t>
+              <a:t>Partner game:</a:t>
             </a:r>
             <a:endParaRPr lang="en-US" sz="2200" dirty="0"/>
           </a:p>
@@ -27957,7 +27694,7 @@
                 <a:ea typeface="Lexend Deca" pitchFamily="34" charset="-122"/>
                 <a:cs typeface="Lexend Deca" pitchFamily="34" charset="-120"/>
               </a:rPr>
-              <a:t>☝️ 🗣️  Look at the picture. Say the word.</a:t>
+              <a:t>Look at the picture. Say the word.</a:t>
             </a:r>
             <a:endParaRPr lang="en-US" sz="2400" dirty="0"/>
           </a:p>
@@ -29394,8 +29131,8 @@
         </p:nvSpPr>
         <p:spPr>
           <a:xfrm>
-            <a:off x="5349240" y="4251960"/>
-            <a:ext cx="2606040" cy="548640"/>
+            <a:off x="4389120" y="4251960"/>
+            <a:ext cx="3566160" cy="548640"/>
           </a:xfrm>
           <a:prstGeom prst="roundRect">
             <a:avLst>
@@ -29435,14 +29172,14 @@
       </p:sp>
       <p:sp>
         <p:nvSpPr>
-          <p:cNvPr id="26" name="Wh 1"/>
+          <p:cNvPr id="27" name="Helper 1"/>
           <p:cNvSpPr/>
           <p:nvPr/>
         </p:nvSpPr>
         <p:spPr>
           <a:xfrm>
             <a:off x="4389120" y="4251960"/>
-            <a:ext cx="960120" cy="548640"/>
+            <a:ext cx="3566160" cy="548640"/>
           </a:xfrm>
           <a:prstGeom prst="rect">
             <a:avLst/>
@@ -29458,19 +29195,19 @@
           </a:bodyPr>
           <a:lstStyle/>
           <a:p>
-            <a:pPr algn="l" indent="0" marL="0">
-              <a:buNone/>
-            </a:pPr>
-            <a:r>
-              <a:rPr lang="en-US" sz="2200" dirty="0">
-                <a:solidFill>
-                  <a:srgbClr val="1B2236"/>
-                </a:solidFill>
-                <a:latin typeface="Lexend Deca" pitchFamily="34" charset="0"/>
-                <a:ea typeface="Lexend Deca" pitchFamily="34" charset="-122"/>
-                <a:cs typeface="Lexend Deca" pitchFamily="34" charset="-120"/>
-              </a:rPr>
-              <a:t>👂</a:t>
+            <a:pPr algn="ctr" indent="0" marL="0">
+              <a:buNone/>
+            </a:pPr>
+            <a:r>
+              <a:rPr lang="en-US" sz="2200" dirty="0" b="1">
+                <a:solidFill>
+                  <a:srgbClr val="1B2236"/>
+                </a:solidFill>
+                <a:latin typeface="Lexend Deca" pitchFamily="34" charset="0"/>
+                <a:ea typeface="Lexend Deca" pitchFamily="34" charset="-122"/>
+                <a:cs typeface="Lexend Deca" pitchFamily="34" charset="-120"/>
+              </a:rPr>
+              <a:t>Listen.</a:t>
             </a:r>
             <a:endParaRPr lang="en-US" sz="2200" dirty="0"/>
           </a:p>
@@ -29478,57 +29215,14 @@
       </p:sp>
       <p:sp>
         <p:nvSpPr>
-          <p:cNvPr id="27" name="Helper 1"/>
-          <p:cNvSpPr/>
-          <p:nvPr/>
-        </p:nvSpPr>
-        <p:spPr>
-          <a:xfrm>
-            <a:off x="5349240" y="4251960"/>
-            <a:ext cx="2606040" cy="548640"/>
-          </a:xfrm>
-          <a:prstGeom prst="rect">
-            <a:avLst/>
-          </a:prstGeom>
-          <a:noFill/>
-          <a:ln w="38100">
-            <a:noFill/>
-          </a:ln>
-        </p:spPr>
-        <p:txBody>
-          <a:bodyPr wrap="square" lIns="0" tIns="36576" rIns="0" bIns="36576" rtlCol="0" anchor="ctr">
-            <a:noAutofit/>
-          </a:bodyPr>
-          <a:lstStyle/>
-          <a:p>
-            <a:pPr algn="ctr" indent="0" marL="0">
-              <a:buNone/>
-            </a:pPr>
-            <a:r>
-              <a:rPr lang="en-US" sz="2200" dirty="0" b="1">
-                <a:solidFill>
-                  <a:srgbClr val="1B2236"/>
-                </a:solidFill>
-                <a:latin typeface="Lexend Deca" pitchFamily="34" charset="0"/>
-                <a:ea typeface="Lexend Deca" pitchFamily="34" charset="-122"/>
-                <a:cs typeface="Lexend Deca" pitchFamily="34" charset="-120"/>
-              </a:rPr>
-              <a:t>Listen.</a:t>
-            </a:r>
-            <a:endParaRPr lang="en-US" sz="2200" dirty="0"/>
-          </a:p>
-        </p:txBody>
-      </p:sp>
-      <p:sp>
-        <p:nvSpPr>
           <p:cNvPr id="29" name="Highlight 2"/>
           <p:cNvSpPr/>
           <p:nvPr/>
         </p:nvSpPr>
         <p:spPr>
           <a:xfrm>
-            <a:off x="5349240" y="5056632"/>
-            <a:ext cx="2606040" cy="548640"/>
+            <a:off x="4389120" y="5056632"/>
+            <a:ext cx="3566160" cy="548640"/>
           </a:xfrm>
           <a:prstGeom prst="roundRect">
             <a:avLst>
@@ -29568,14 +29262,14 @@
       </p:sp>
       <p:sp>
         <p:nvSpPr>
-          <p:cNvPr id="30" name="Wh 2"/>
+          <p:cNvPr id="31" name="Helper 2"/>
           <p:cNvSpPr/>
           <p:nvPr/>
         </p:nvSpPr>
         <p:spPr>
           <a:xfrm>
             <a:off x="4389120" y="5056632"/>
-            <a:ext cx="960120" cy="548640"/>
+            <a:ext cx="3566160" cy="548640"/>
           </a:xfrm>
           <a:prstGeom prst="rect">
             <a:avLst/>
@@ -29591,19 +29285,19 @@
           </a:bodyPr>
           <a:lstStyle/>
           <a:p>
-            <a:pPr algn="l" indent="0" marL="0">
-              <a:buNone/>
-            </a:pPr>
-            <a:r>
-              <a:rPr lang="en-US" sz="2200" dirty="0">
-                <a:solidFill>
-                  <a:srgbClr val="1B2236"/>
-                </a:solidFill>
-                <a:latin typeface="Lexend Deca" pitchFamily="34" charset="0"/>
-                <a:ea typeface="Lexend Deca" pitchFamily="34" charset="-122"/>
-                <a:cs typeface="Lexend Deca" pitchFamily="34" charset="-120"/>
-              </a:rPr>
-              <a:t>🗣️</a:t>
+            <a:pPr algn="ctr" indent="0" marL="0">
+              <a:buNone/>
+            </a:pPr>
+            <a:r>
+              <a:rPr lang="en-US" sz="2200" dirty="0" b="1">
+                <a:solidFill>
+                  <a:srgbClr val="1B2236"/>
+                </a:solidFill>
+                <a:latin typeface="Lexend Deca" pitchFamily="34" charset="0"/>
+                <a:ea typeface="Lexend Deca" pitchFamily="34" charset="-122"/>
+                <a:cs typeface="Lexend Deca" pitchFamily="34" charset="-120"/>
+              </a:rPr>
+              <a:t>Repeat.</a:t>
             </a:r>
             <a:endParaRPr lang="en-US" sz="2200" dirty="0"/>
           </a:p>
@@ -29611,57 +29305,14 @@
       </p:sp>
       <p:sp>
         <p:nvSpPr>
-          <p:cNvPr id="31" name="Helper 2"/>
-          <p:cNvSpPr/>
-          <p:nvPr/>
-        </p:nvSpPr>
-        <p:spPr>
-          <a:xfrm>
-            <a:off x="5349240" y="5056632"/>
-            <a:ext cx="2606040" cy="548640"/>
-          </a:xfrm>
-          <a:prstGeom prst="rect">
-            <a:avLst/>
-          </a:prstGeom>
-          <a:noFill/>
-          <a:ln w="38100">
-            <a:noFill/>
-          </a:ln>
-        </p:spPr>
-        <p:txBody>
-          <a:bodyPr wrap="square" lIns="0" tIns="36576" rIns="0" bIns="36576" rtlCol="0" anchor="ctr">
-            <a:noAutofit/>
-          </a:bodyPr>
-          <a:lstStyle/>
-          <a:p>
-            <a:pPr algn="ctr" indent="0" marL="0">
-              <a:buNone/>
-            </a:pPr>
-            <a:r>
-              <a:rPr lang="en-US" sz="2200" dirty="0" b="1">
-                <a:solidFill>
-                  <a:srgbClr val="1B2236"/>
-                </a:solidFill>
-                <a:latin typeface="Lexend Deca" pitchFamily="34" charset="0"/>
-                <a:ea typeface="Lexend Deca" pitchFamily="34" charset="-122"/>
-                <a:cs typeface="Lexend Deca" pitchFamily="34" charset="-120"/>
-              </a:rPr>
-              <a:t>Repeat.</a:t>
-            </a:r>
-            <a:endParaRPr lang="en-US" sz="2200" dirty="0"/>
-          </a:p>
-        </p:txBody>
-      </p:sp>
-      <p:sp>
-        <p:nvSpPr>
           <p:cNvPr id="33" name="Highlight 3"/>
           <p:cNvSpPr/>
           <p:nvPr/>
         </p:nvSpPr>
         <p:spPr>
           <a:xfrm>
-            <a:off x="5349240" y="5861304"/>
-            <a:ext cx="2606040" cy="548640"/>
+            <a:off x="4389120" y="5861304"/>
+            <a:ext cx="3566160" cy="548640"/>
           </a:xfrm>
           <a:prstGeom prst="roundRect">
             <a:avLst>
@@ -29701,14 +29352,14 @@
       </p:sp>
       <p:sp>
         <p:nvSpPr>
-          <p:cNvPr id="34" name="Wh 3"/>
+          <p:cNvPr id="35" name="Helper 3"/>
           <p:cNvSpPr/>
           <p:nvPr/>
         </p:nvSpPr>
         <p:spPr>
           <a:xfrm>
             <a:off x="4389120" y="5861304"/>
-            <a:ext cx="960120" cy="548640"/>
+            <a:ext cx="3566160" cy="548640"/>
           </a:xfrm>
           <a:prstGeom prst="rect">
             <a:avLst/>
@@ -29724,19 +29375,19 @@
           </a:bodyPr>
           <a:lstStyle/>
           <a:p>
-            <a:pPr algn="l" indent="0" marL="0">
-              <a:buNone/>
-            </a:pPr>
-            <a:r>
-              <a:rPr lang="en-US" sz="2200" dirty="0">
-                <a:solidFill>
-                  <a:srgbClr val="1B2236"/>
-                </a:solidFill>
-                <a:latin typeface="Lexend Deca" pitchFamily="34" charset="0"/>
-                <a:ea typeface="Lexend Deca" pitchFamily="34" charset="-122"/>
-                <a:cs typeface="Lexend Deca" pitchFamily="34" charset="-120"/>
-              </a:rPr>
-              <a:t>✏️</a:t>
+            <a:pPr algn="ctr" indent="0" marL="0">
+              <a:buNone/>
+            </a:pPr>
+            <a:r>
+              <a:rPr lang="en-US" sz="2200" dirty="0" b="1">
+                <a:solidFill>
+                  <a:srgbClr val="1B2236"/>
+                </a:solidFill>
+                <a:latin typeface="Lexend Deca" pitchFamily="34" charset="0"/>
+                <a:ea typeface="Lexend Deca" pitchFamily="34" charset="-122"/>
+                <a:cs typeface="Lexend Deca" pitchFamily="34" charset="-120"/>
+              </a:rPr>
+              <a:t>Write.</a:t>
             </a:r>
             <a:endParaRPr lang="en-US" sz="2200" dirty="0"/>
           </a:p>
@@ -29744,14 +29395,14 @@
       </p:sp>
       <p:sp>
         <p:nvSpPr>
-          <p:cNvPr id="35" name="Helper 3"/>
-          <p:cNvSpPr/>
-          <p:nvPr/>
-        </p:nvSpPr>
-        <p:spPr>
-          <a:xfrm>
-            <a:off x="5349240" y="5861304"/>
-            <a:ext cx="2606040" cy="548640"/>
+          <p:cNvPr id="37" name="Order head"/>
+          <p:cNvSpPr/>
+          <p:nvPr/>
+        </p:nvSpPr>
+        <p:spPr>
+          <a:xfrm>
+            <a:off x="8549640" y="1280160"/>
+            <a:ext cx="3017520" cy="548640"/>
           </a:xfrm>
           <a:prstGeom prst="rect">
             <a:avLst/>
@@ -29762,39 +29413,39 @@
           </a:ln>
         </p:spPr>
         <p:txBody>
-          <a:bodyPr wrap="square" lIns="0" tIns="36576" rIns="0" bIns="36576" rtlCol="0" anchor="ctr">
+          <a:bodyPr wrap="square" lIns="73152" tIns="36576" rIns="73152" bIns="36576" rtlCol="0" anchor="ctr">
             <a:noAutofit/>
           </a:bodyPr>
           <a:lstStyle/>
           <a:p>
-            <a:pPr algn="ctr" indent="0" marL="0">
-              <a:buNone/>
-            </a:pPr>
-            <a:r>
-              <a:rPr lang="en-US" sz="2200" dirty="0" b="1">
-                <a:solidFill>
-                  <a:srgbClr val="1B2236"/>
-                </a:solidFill>
-                <a:latin typeface="Lexend Deca" pitchFamily="34" charset="0"/>
-                <a:ea typeface="Lexend Deca" pitchFamily="34" charset="-122"/>
-                <a:cs typeface="Lexend Deca" pitchFamily="34" charset="-120"/>
-              </a:rPr>
-              <a:t>Write.</a:t>
-            </a:r>
-            <a:endParaRPr lang="en-US" sz="2200" dirty="0"/>
-          </a:p>
-        </p:txBody>
-      </p:sp>
-      <p:sp>
-        <p:nvSpPr>
-          <p:cNvPr id="37" name="Order head"/>
-          <p:cNvSpPr/>
-          <p:nvPr/>
-        </p:nvSpPr>
-        <p:spPr>
-          <a:xfrm>
-            <a:off x="8549640" y="1280160"/>
-            <a:ext cx="3017520" cy="548640"/>
+            <a:pPr algn="l" indent="0" marL="0">
+              <a:buNone/>
+            </a:pPr>
+            <a:r>
+              <a:rPr lang="en-US" sz="2400" dirty="0" b="1">
+                <a:solidFill>
+                  <a:srgbClr val="1B2236"/>
+                </a:solidFill>
+                <a:latin typeface="Lexend Deca" pitchFamily="34" charset="0"/>
+                <a:ea typeface="Lexend Deca" pitchFamily="34" charset="-122"/>
+                <a:cs typeface="Lexend Deca" pitchFamily="34" charset="-120"/>
+              </a:rPr>
+              <a:t>Help!</a:t>
+            </a:r>
+            <a:endParaRPr lang="en-US" sz="2400" dirty="0"/>
+          </a:p>
+        </p:txBody>
+      </p:sp>
+      <p:sp>
+        <p:nvSpPr>
+          <p:cNvPr id="39" name="Step 1"/>
+          <p:cNvSpPr/>
+          <p:nvPr/>
+        </p:nvSpPr>
+        <p:spPr>
+          <a:xfrm>
+            <a:off x="8549640" y="1965960"/>
+            <a:ext cx="3063240" cy="914400"/>
           </a:xfrm>
           <a:prstGeom prst="rect">
             <a:avLst/>
@@ -29814,60 +29465,15 @@
               <a:buNone/>
             </a:pPr>
             <a:r>
-              <a:rPr lang="en-US" sz="2400" dirty="0" b="1">
-                <a:solidFill>
-                  <a:srgbClr val="1B2236"/>
-                </a:solidFill>
-                <a:latin typeface="Lexend Deca" pitchFamily="34" charset="0"/>
-                <a:ea typeface="Lexend Deca" pitchFamily="34" charset="-122"/>
-                <a:cs typeface="Lexend Deca" pitchFamily="34" charset="-120"/>
-              </a:rPr>
-              <a:t>Help!</a:t>
-            </a:r>
-            <a:endParaRPr lang="en-US" sz="2400" dirty="0"/>
-          </a:p>
-        </p:txBody>
-      </p:sp>
-      <p:sp>
-        <p:nvSpPr>
-          <p:cNvPr id="38" name="Step num 1"/>
-          <p:cNvSpPr/>
-          <p:nvPr/>
-        </p:nvSpPr>
-        <p:spPr>
-          <a:xfrm>
-            <a:off x="8549640" y="1965960"/>
-            <a:ext cx="548640" cy="548640"/>
-          </a:xfrm>
-          <a:prstGeom prst="ellipse">
-            <a:avLst/>
-          </a:prstGeom>
-          <a:solidFill>
-            <a:srgbClr val="FFFFFF"/>
-          </a:solidFill>
-          <a:ln w="38100">
-            <a:noFill/>
-          </a:ln>
-        </p:spPr>
-        <p:txBody>
-          <a:bodyPr wrap="square" lIns="0" tIns="36576" rIns="0" bIns="36576" rtlCol="0" anchor="ctr">
-            <a:noAutofit/>
-          </a:bodyPr>
-          <a:lstStyle/>
-          <a:p>
-            <a:pPr algn="ctr" indent="0" marL="0">
-              <a:buNone/>
-            </a:pPr>
-            <a:r>
-              <a:rPr lang="en-US" sz="2200" dirty="0" b="1">
-                <a:solidFill>
-                  <a:srgbClr val="1B2236"/>
-                </a:solidFill>
-                <a:latin typeface="Lexend Deca" pitchFamily="34" charset="0"/>
-                <a:ea typeface="Lexend Deca" pitchFamily="34" charset="-122"/>
-                <a:cs typeface="Lexend Deca" pitchFamily="34" charset="-120"/>
-              </a:rPr>
-              <a:t>🔁</a:t>
+              <a:rPr lang="en-US" sz="2200" dirty="0">
+                <a:solidFill>
+                  <a:srgbClr val="1B2236"/>
+                </a:solidFill>
+                <a:latin typeface="Lexend Deca" pitchFamily="34" charset="0"/>
+                <a:ea typeface="Lexend Deca" pitchFamily="34" charset="-122"/>
+                <a:cs typeface="Lexend Deca" pitchFamily="34" charset="-120"/>
+              </a:rPr>
+              <a:t>Can you repeat, please?</a:t>
             </a:r>
             <a:endParaRPr lang="en-US" sz="2200" dirty="0"/>
           </a:p>
@@ -29875,14 +29481,14 @@
       </p:sp>
       <p:sp>
         <p:nvSpPr>
-          <p:cNvPr id="39" name="Step 1"/>
-          <p:cNvSpPr/>
-          <p:nvPr/>
-        </p:nvSpPr>
-        <p:spPr>
-          <a:xfrm>
-            <a:off x="9235440" y="1965960"/>
-            <a:ext cx="2377440" cy="914400"/>
+          <p:cNvPr id="41" name="Step 2"/>
+          <p:cNvSpPr/>
+          <p:nvPr/>
+        </p:nvSpPr>
+        <p:spPr>
+          <a:xfrm>
+            <a:off x="8549640" y="3017520"/>
+            <a:ext cx="3063240" cy="914400"/>
           </a:xfrm>
           <a:prstGeom prst="rect">
             <a:avLst/>
@@ -29910,7 +29516,7 @@
                 <a:ea typeface="Lexend Deca" pitchFamily="34" charset="-122"/>
                 <a:cs typeface="Lexend Deca" pitchFamily="34" charset="-120"/>
               </a:rPr>
-              <a:t>Can you repeat, please?</a:t>
+              <a:t>I don't understand.</a:t>
             </a:r>
             <a:endParaRPr lang="en-US" sz="2200" dirty="0"/>
           </a:p>
@@ -29918,147 +29524,14 @@
       </p:sp>
       <p:sp>
         <p:nvSpPr>
-          <p:cNvPr id="40" name="Step num 2"/>
-          <p:cNvSpPr/>
-          <p:nvPr/>
-        </p:nvSpPr>
-        <p:spPr>
-          <a:xfrm>
-            <a:off x="8549640" y="3017520"/>
-            <a:ext cx="548640" cy="548640"/>
-          </a:xfrm>
-          <a:prstGeom prst="ellipse">
-            <a:avLst/>
-          </a:prstGeom>
-          <a:solidFill>
-            <a:srgbClr val="FFFFFF"/>
-          </a:solidFill>
-          <a:ln w="38100">
-            <a:noFill/>
-          </a:ln>
-        </p:spPr>
-        <p:txBody>
-          <a:bodyPr wrap="square" lIns="0" tIns="36576" rIns="0" bIns="36576" rtlCol="0" anchor="ctr">
-            <a:noAutofit/>
-          </a:bodyPr>
-          <a:lstStyle/>
-          <a:p>
-            <a:pPr algn="ctr" indent="0" marL="0">
-              <a:buNone/>
-            </a:pPr>
-            <a:r>
-              <a:rPr lang="en-US" sz="2200" dirty="0" b="1">
-                <a:solidFill>
-                  <a:srgbClr val="1B2236"/>
-                </a:solidFill>
-                <a:latin typeface="Lexend Deca" pitchFamily="34" charset="0"/>
-                <a:ea typeface="Lexend Deca" pitchFamily="34" charset="-122"/>
-                <a:cs typeface="Lexend Deca" pitchFamily="34" charset="-120"/>
-              </a:rPr>
-              <a:t>🤷</a:t>
-            </a:r>
-            <a:endParaRPr lang="en-US" sz="2200" dirty="0"/>
-          </a:p>
-        </p:txBody>
-      </p:sp>
-      <p:sp>
-        <p:nvSpPr>
-          <p:cNvPr id="41" name="Step 2"/>
-          <p:cNvSpPr/>
-          <p:nvPr/>
-        </p:nvSpPr>
-        <p:spPr>
-          <a:xfrm>
-            <a:off x="9235440" y="3017520"/>
-            <a:ext cx="2377440" cy="914400"/>
-          </a:xfrm>
-          <a:prstGeom prst="rect">
-            <a:avLst/>
-          </a:prstGeom>
-          <a:noFill/>
-          <a:ln w="38100">
-            <a:noFill/>
-          </a:ln>
-        </p:spPr>
-        <p:txBody>
-          <a:bodyPr wrap="square" lIns="73152" tIns="36576" rIns="73152" bIns="36576" rtlCol="0" anchor="ctr">
-            <a:noAutofit/>
-          </a:bodyPr>
-          <a:lstStyle/>
-          <a:p>
-            <a:pPr algn="l" indent="0" marL="0">
-              <a:buNone/>
-            </a:pPr>
-            <a:r>
-              <a:rPr lang="en-US" sz="2200" dirty="0">
-                <a:solidFill>
-                  <a:srgbClr val="1B2236"/>
-                </a:solidFill>
-                <a:latin typeface="Lexend Deca" pitchFamily="34" charset="0"/>
-                <a:ea typeface="Lexend Deca" pitchFamily="34" charset="-122"/>
-                <a:cs typeface="Lexend Deca" pitchFamily="34" charset="-120"/>
-              </a:rPr>
-              <a:t>I don't understand.</a:t>
-            </a:r>
-            <a:endParaRPr lang="en-US" sz="2200" dirty="0"/>
-          </a:p>
-        </p:txBody>
-      </p:sp>
-      <p:sp>
-        <p:nvSpPr>
-          <p:cNvPr id="42" name="Step num 3"/>
+          <p:cNvPr id="43" name="Step 3"/>
           <p:cNvSpPr/>
           <p:nvPr/>
         </p:nvSpPr>
         <p:spPr>
           <a:xfrm>
             <a:off x="8549640" y="4069080"/>
-            <a:ext cx="548640" cy="548640"/>
-          </a:xfrm>
-          <a:prstGeom prst="ellipse">
-            <a:avLst/>
-          </a:prstGeom>
-          <a:solidFill>
-            <a:srgbClr val="FFFFFF"/>
-          </a:solidFill>
-          <a:ln w="38100">
-            <a:noFill/>
-          </a:ln>
-        </p:spPr>
-        <p:txBody>
-          <a:bodyPr wrap="square" lIns="0" tIns="36576" rIns="0" bIns="36576" rtlCol="0" anchor="ctr">
-            <a:noAutofit/>
-          </a:bodyPr>
-          <a:lstStyle/>
-          <a:p>
-            <a:pPr algn="ctr" indent="0" marL="0">
-              <a:buNone/>
-            </a:pPr>
-            <a:r>
-              <a:rPr lang="en-US" sz="2200" dirty="0" b="1">
-                <a:solidFill>
-                  <a:srgbClr val="1B2236"/>
-                </a:solidFill>
-                <a:latin typeface="Lexend Deca" pitchFamily="34" charset="0"/>
-                <a:ea typeface="Lexend Deca" pitchFamily="34" charset="-122"/>
-                <a:cs typeface="Lexend Deca" pitchFamily="34" charset="-120"/>
-              </a:rPr>
-              <a:t>❓</a:t>
-            </a:r>
-            <a:endParaRPr lang="en-US" sz="2200" dirty="0"/>
-          </a:p>
-        </p:txBody>
-      </p:sp>
-      <p:sp>
-        <p:nvSpPr>
-          <p:cNvPr id="43" name="Step 3"/>
-          <p:cNvSpPr/>
-          <p:nvPr/>
-        </p:nvSpPr>
-        <p:spPr>
-          <a:xfrm>
-            <a:off x="9235440" y="4069080"/>
-            <a:ext cx="2377440" cy="914400"/>
+            <a:ext cx="3063240" cy="914400"/>
           </a:xfrm>
           <a:prstGeom prst="rect">
             <a:avLst/>
@@ -30550,7 +30023,7 @@
                 <a:ea typeface="Lexend Deca" pitchFamily="34" charset="-122"/>
                 <a:cs typeface="Lexend Deca" pitchFamily="34" charset="-120"/>
               </a:rPr>
-              <a:t>👂 ✅  Listen. Who is it?</a:t>
+              <a:t>Listen. Who is it?</a:t>
             </a:r>
             <a:endParaRPr lang="en-US" sz="2200" dirty="0"/>
           </a:p>
@@ -30570,7 +30043,7 @@
                 <a:ea typeface="Lexend Deca" pitchFamily="34" charset="-122"/>
                 <a:cs typeface="Lexend Deca" pitchFamily="34" charset="-120"/>
               </a:rPr>
-              <a:t>Ana or Carlos?</a:t>
+              <a:t>Check ✓ Ana or Carlos.</a:t>
             </a:r>
             <a:endParaRPr lang="en-US" sz="2200" dirty="0"/>
           </a:p>

--- a/level1/slides/Level1_Lesson1_Slides.pptx
+++ b/level1/slides/Level1_Lesson1_Slides.pptx
@@ -22540,7 +22540,7 @@
                 <a:ea typeface="Lexend Deca" pitchFamily="34" charset="-122"/>
                 <a:cs typeface="Lexend Deca" pitchFamily="34" charset="-120"/>
               </a:rPr>
-              <a:t>Audio: synthetic voices made with Chatterbox TTS (MIT License); each file carries an inaudible Perth watermark marking it as AI-generated. Ana's voice is based on LibriTTS-R speaker 1580 (Koizumi et al. 2023, CC BY 4.0), from LibriVox public-domain readings. Font: Lexend Deca (OFL 1.1).</a:t>
+              <a:t>Audio: synthetic voices made with Chatterbox TTS (MIT License); each file carries an inaudible Perth watermark marking it as AI-generated. The voices are copied from short reference clips made with Kokoro-82M (Apache 2.0); no recordings of real people were used. Font: Lexend Deca (OFL 1.1).</a:t>
             </a:r>
             <a:endParaRPr lang="en-US" sz="2200" dirty="0"/>
           </a:p>

--- a/level1/slides/Level1_Lesson1_Slides.pptx
+++ b/level1/slides/Level1_Lesson1_Slides.pptx
@@ -4397,7 +4397,7 @@
                 <a:ea typeface="Lexend Deca" pitchFamily="34" charset="-122"/>
                 <a:cs typeface="Lexend Deca" pitchFamily="34" charset="-120"/>
               </a:rPr>
-              <a:t>👩 Ana</a:t>
+              <a:t>Ana</a:t>
             </a:r>
             <a:endParaRPr lang="en-US" sz="2200" dirty="0"/>
           </a:p>
@@ -4527,7 +4527,7 @@
                 <a:ea typeface="Lexend Deca" pitchFamily="34" charset="-122"/>
                 <a:cs typeface="Lexend Deca" pitchFamily="34" charset="-120"/>
               </a:rPr>
-              <a:t>👨 Carlos</a:t>
+              <a:t>Carlos</a:t>
             </a:r>
             <a:endParaRPr lang="en-US" sz="2200" dirty="0"/>
           </a:p>
@@ -6111,7 +6111,7 @@
                 <a:ea typeface="Lexend Deca" pitchFamily="34" charset="-122"/>
                 <a:cs typeface="Lexend Deca" pitchFamily="34" charset="-120"/>
               </a:rPr>
-              <a:t>👩 Ana:  __  __  __  __</a:t>
+              <a:t>Ana:  __  __  __  __</a:t>
             </a:r>
             <a:endParaRPr lang="en-US" sz="2000" dirty="0"/>
           </a:p>
@@ -6150,7 +6150,7 @@
                 <a:ea typeface="Lexend Deca" pitchFamily="34" charset="-122"/>
                 <a:cs typeface="Lexend Deca" pitchFamily="34" charset="-120"/>
               </a:rPr>
-              <a:t>👨 Carlos:  __  __  __  __</a:t>
+              <a:t>Carlos:  __  __  __  __</a:t>
             </a:r>
             <a:endParaRPr lang="en-US" sz="2000" dirty="0"/>
           </a:p>
